--- a/media/resources/files/EkiOrunduuOnduktar_Kemituu_MagaKorsot.pptx
+++ b/media/resources/files/EkiOrunduuOnduktar_Kemituu_MagaKorsot.pptx
@@ -9124,7 +9124,7 @@
                 <a:ea typeface="+mn-ea"/>
                 <a:cs typeface="+mn-cs"/>
               </a:rPr>
-              <a:t>Турдуу пикирлер учун ыраазычылык билдиребиз.</a:t>
+              <a:t>Түрдүү пикирлер үчүн ыраазычылык билдиребиз.</a:t>
             </a:r>
           </a:p>
           <a:p>

--- a/media/resources/files/EkiOrunduuOnduktar_Kemituu_MagaKorsot.pptx
+++ b/media/resources/files/EkiOrunduuOnduktar_Kemituu_MagaKorsot.pptx
@@ -1737,7 +1737,7 @@
             <a:pPr algn="ctr"/>
             <a:r>
               <a:rPr lang="en-GB" sz="5400" dirty="0"/>
-              <a:t>0.5   −   0.22   =   _________</a:t>
+              <a:t>0,5   −   0,22   =   _________</a:t>
             </a:r>
           </a:p>
         </p:txBody>
@@ -3942,7 +3942,7 @@
             <a:pPr algn="ctr"/>
             <a:r>
               <a:rPr lang="en-GB" sz="5400" dirty="0"/>
-              <a:t>0.34   −   0.17   =   _________</a:t>
+              <a:t>0,34   −   0,17   =   _________</a:t>
             </a:r>
           </a:p>
         </p:txBody>
@@ -5423,7 +5423,7 @@
             <a:pPr algn="ctr"/>
             <a:r>
               <a:rPr lang="en-GB" sz="5400" dirty="0"/>
-              <a:t>1.26   −   0.78   =   _________</a:t>
+              <a:t>1,26   −   0,78   =   _________</a:t>
             </a:r>
           </a:p>
         </p:txBody>
@@ -9328,7 +9328,7 @@
             <a:pPr algn="ctr"/>
             <a:r>
               <a:rPr lang="en-GB" sz="5400" dirty="0"/>
-              <a:t>1   −   0.8   =   _________</a:t>
+              <a:t>1   −   0,8   =   _________</a:t>
             </a:r>
           </a:p>
         </p:txBody>
@@ -10771,7 +10771,7 @@
             <a:pPr algn="ctr"/>
             <a:r>
               <a:rPr lang="en-GB" sz="5400" dirty="0"/>
-              <a:t>1.4   −   0.2   =   _________</a:t>
+              <a:t>1,4   −   0,2   =   _________</a:t>
             </a:r>
           </a:p>
         </p:txBody>
@@ -18210,7 +18210,7 @@
             <a:pPr algn="ctr"/>
             <a:r>
               <a:rPr lang="en-GB" sz="5400" dirty="0"/>
-              <a:t>0.26   −   0.03   =   _________</a:t>
+              <a:t>0,26   −   0,03   =   _________</a:t>
             </a:r>
           </a:p>
         </p:txBody>
@@ -19940,7 +19940,7 @@
             <a:pPr algn="ctr"/>
             <a:r>
               <a:rPr lang="en-GB" sz="5400" dirty="0"/>
-              <a:t>0.3   −   0.05   =   _________</a:t>
+              <a:t>0,3   −   0,05   =   _________</a:t>
             </a:r>
           </a:p>
         </p:txBody>
@@ -21860,7 +21860,7 @@
             <a:pPr algn="ctr"/>
             <a:r>
               <a:rPr lang="en-GB" sz="5400" dirty="0"/>
-              <a:t>1.37   −   0.21   =   _________</a:t>
+              <a:t>1,37   −   0,21   =   _________</a:t>
             </a:r>
           </a:p>
         </p:txBody>
@@ -29242,7 +29242,7 @@
             <a:pPr algn="ctr"/>
             <a:r>
               <a:rPr lang="en-GB" sz="5400" dirty="0"/>
-              <a:t>0.32   −   0.04   =   _________</a:t>
+              <a:t>0,32   −   0,04   =   _________</a:t>
             </a:r>
           </a:p>
         </p:txBody>
@@ -31447,7 +31447,7 @@
             <a:pPr algn="ctr"/>
             <a:r>
               <a:rPr lang="en-GB" sz="5400" dirty="0"/>
-              <a:t>0.12   −   0.1   =   _________</a:t>
+              <a:t>0,12   −   0,1   =   _________</a:t>
             </a:r>
           </a:p>
         </p:txBody>
@@ -31824,7 +31824,7 @@
             <a:pPr algn="ctr"/>
             <a:r>
               <a:rPr lang="en-GB" sz="5400" dirty="0"/>
-              <a:t>1.04   −   0.62   =   _________</a:t>
+              <a:t>1,04   −   0,62   =   _________</a:t>
             </a:r>
           </a:p>
         </p:txBody>
